--- a/assets/pptx/catalog-38.pptx
+++ b/assets/pptx/catalog-38.pptx
@@ -3423,7 +3423,7 @@
                 <a:ea typeface="Ebrima"/>
                 <a:cs typeface="Ebrima"/>
               </a:rPr>
-              <a:t>ታሪኬ ተለወጠ (2x)</a:t>
+              <a:t>ታሪኬ ተለወጠ 2x</a:t>
             </a:r>
           </a:p>
         </p:txBody>
@@ -3732,7 +3732,7 @@
                 <a:ea typeface="Ebrima"/>
                 <a:cs typeface="Ebrima"/>
               </a:rPr>
-              <a:t>አከበረኝ መልሶ (2x)</a:t>
+              <a:t>አከበረኝ መልሶ 2x</a:t>
             </a:r>
           </a:p>
         </p:txBody>
@@ -3974,7 +3974,7 @@
                 <a:ea typeface="Ebrima"/>
                 <a:cs typeface="Ebrima"/>
               </a:rPr>
-              <a:t>ሽባነቴን ሽሮ አቆመኝ ቀይሮ (2x)</a:t>
+              <a:t>ሽባነቴን ሽሮ አቆመኝ ቀይሮ 2x</a:t>
             </a:r>
           </a:p>
         </p:txBody>
